--- a/Разработка анализатора подозрительности URL.pptx
+++ b/Разработка анализатора подозрительности URL.pptx
@@ -3646,11 +3646,57 @@
           </a:p>
         </p:txBody>
       </p:sp>
+      <p:sp>
+        <p:nvSpPr>
+          <p:cNvPr id="6" name="TextBox 5"/>
+          <p:cNvSpPr txBox="1"/>
+          <p:nvPr/>
+        </p:nvSpPr>
+        <p:spPr>
+          <a:xfrm>
+            <a:off x="422859" y="4656922"/>
+            <a:ext cx="8022678" cy="307777"/>
+          </a:xfrm>
+          <a:prstGeom prst="rect">
+            <a:avLst/>
+          </a:prstGeom>
+          <a:noFill/>
+        </p:spPr>
+        <p:txBody>
+          <a:bodyPr wrap="square" rtlCol="0">
+            <a:spAutoFit/>
+          </a:bodyPr>
+          <a:lstStyle/>
+          <a:p>
+            <a:r>
+              <a:rPr lang="ru-RU" sz="1400" dirty="0" smtClean="0"/>
+              <a:t>Участники разработки: </a:t>
+            </a:r>
+            <a:r>
+              <a:rPr lang="ru-RU" sz="1400" dirty="0" err="1" smtClean="0"/>
+              <a:t>Семёнова</a:t>
+            </a:r>
+            <a:r>
+              <a:rPr lang="ru-RU" sz="1400" dirty="0" smtClean="0"/>
+              <a:t> Анжелика, Маруева Дарья, Капустина Валерия, </a:t>
+            </a:r>
+            <a:r>
+              <a:rPr lang="ru-RU" sz="1400" dirty="0" err="1" smtClean="0"/>
+              <a:t>Измалкова</a:t>
+            </a:r>
+            <a:r>
+              <a:rPr lang="ru-RU" sz="1400" dirty="0" smtClean="0"/>
+              <a:t> Виктория</a:t>
+            </a:r>
+            <a:endParaRPr lang="ru-RU" sz="1400" dirty="0"/>
+          </a:p>
+        </p:txBody>
+      </p:sp>
       <p:pic>
         <p:nvPicPr>
-          <p:cNvPr id="4" name="Рисунок 3"/>
+          <p:cNvPr id="1026" name="Picture 2"/>
           <p:cNvPicPr>
-            <a:picLocks noChangeAspect="1"/>
+            <a:picLocks noChangeAspect="1" noChangeArrowheads="1"/>
           </p:cNvPicPr>
           <p:nvPr/>
         </p:nvPicPr>
@@ -3662,18 +3708,52 @@
               </a:ext>
             </a:extLst>
           </a:blip>
+          <a:srcRect/>
           <a:stretch>
             <a:fillRect/>
           </a:stretch>
         </p:blipFill>
-        <p:spPr>
+        <p:spPr bwMode="auto">
           <a:xfrm>
-            <a:off x="3851919" y="339502"/>
-            <a:ext cx="1076669" cy="1080120"/>
+            <a:off x="3852106" y="267494"/>
+            <a:ext cx="1164184" cy="1128838"/>
           </a:xfrm>
           <a:prstGeom prst="rect">
             <a:avLst/>
           </a:prstGeom>
+          <a:noFill/>
+          <a:ln>
+            <a:noFill/>
+          </a:ln>
+          <a:effectLst/>
+          <a:extLst>
+            <a:ext uri="{909E8E84-426E-40DD-AFC4-6F175D3DCCD1}">
+              <a14:hiddenFill xmlns:a14="http://schemas.microsoft.com/office/drawing/2010/main">
+                <a:solidFill>
+                  <a:schemeClr val="accent1"/>
+                </a:solidFill>
+              </a14:hiddenFill>
+            </a:ext>
+            <a:ext uri="{91240B29-F687-4F45-9708-019B960494DF}">
+              <a14:hiddenLine xmlns:a14="http://schemas.microsoft.com/office/drawing/2010/main" w="9525">
+                <a:solidFill>
+                  <a:schemeClr val="tx1"/>
+                </a:solidFill>
+                <a:miter lim="800000"/>
+                <a:headEnd/>
+                <a:tailEnd/>
+              </a14:hiddenLine>
+            </a:ext>
+            <a:ext uri="{AF507438-7753-43E0-B8FC-AC1667EBCBE1}">
+              <a14:hiddenEffects xmlns:a14="http://schemas.microsoft.com/office/drawing/2010/main">
+                <a:effectLst>
+                  <a:outerShdw dist="35921" dir="2700000" algn="ctr" rotWithShape="0">
+                    <a:schemeClr val="bg2"/>
+                  </a:outerShdw>
+                </a:effectLst>
+              </a14:hiddenEffects>
+            </a:ext>
+          </a:extLst>
         </p:spPr>
       </p:pic>
     </p:spTree>
@@ -3686,11 +3766,11 @@
   <p:clrMapOvr>
     <a:masterClrMapping/>
   </p:clrMapOvr>
-  <mc:AlternateContent xmlns:mc="http://schemas.openxmlformats.org/markup-compatibility/2006">
-    <mc:Choice xmlns:p14="http://schemas.microsoft.com/office/powerpoint/2010/main" Requires="p14">
+  <mc:AlternateContent xmlns:mc="http://schemas.openxmlformats.org/markup-compatibility/2006" xmlns:p14="http://schemas.microsoft.com/office/powerpoint/2010/main">
+    <mc:Choice Requires="p14">
       <p:transition p14:dur="0"/>
     </mc:Choice>
-    <mc:Fallback>
+    <mc:Fallback xmlns="">
       <p:transition/>
     </mc:Fallback>
   </mc:AlternateContent>
@@ -8236,13 +8316,7 @@
               <a:rPr lang="ru-RU" sz="2000" b="1" dirty="0" smtClean="0">
                 <a:latin typeface="Bahnschrift" panose="020B0502040204020203" pitchFamily="34" charset="0"/>
               </a:rPr>
-              <a:t> </a:t>
-            </a:r>
-            <a:r>
-              <a:rPr lang="ru-RU" sz="2000" b="1" dirty="0" smtClean="0">
-                <a:latin typeface="Bahnschrift" panose="020B0502040204020203" pitchFamily="34" charset="0"/>
-              </a:rPr>
-              <a:t>в анализаторе.</a:t>
+              <a:t> в анализаторе.</a:t>
             </a:r>
             <a:r>
               <a:rPr lang="ru-RU" sz="2000" dirty="0" smtClean="0">
@@ -14032,11 +14106,11 @@
   <p:clrMapOvr>
     <a:masterClrMapping/>
   </p:clrMapOvr>
-  <mc:AlternateContent xmlns:mc="http://schemas.openxmlformats.org/markup-compatibility/2006">
-    <mc:Choice xmlns:p14="http://schemas.microsoft.com/office/powerpoint/2010/main" Requires="p14">
+  <mc:AlternateContent xmlns:mc="http://schemas.openxmlformats.org/markup-compatibility/2006" xmlns:p14="http://schemas.microsoft.com/office/powerpoint/2010/main">
+    <mc:Choice Requires="p14">
       <p:transition p14:dur="10"/>
     </mc:Choice>
-    <mc:Fallback>
+    <mc:Fallback xmlns="">
       <p:transition/>
     </mc:Fallback>
   </mc:AlternateContent>
@@ -16859,7 +16933,7 @@
         <p:spPr>
           <a:xfrm>
             <a:off x="5578358" y="0"/>
-            <a:ext cx="3563888" cy="4001095"/>
+            <a:ext cx="3563888" cy="4832092"/>
           </a:xfrm>
           <a:prstGeom prst="rect">
             <a:avLst/>
@@ -16949,6 +17023,21 @@
               </a:rPr>
               <a:t>срабатывания</a:t>
             </a:r>
+          </a:p>
+          <a:p>
+            <a:pPr marL="285750" indent="-285750">
+              <a:buFont typeface="Arial" panose="020B0604020202020204" pitchFamily="34" charset="0"/>
+              <a:buChar char="•"/>
+            </a:pPr>
+            <a:r>
+              <a:rPr lang="ru-RU" altLang="en-US" dirty="0" smtClean="0">
+                <a:latin typeface="Bahnschrift" panose="020B0502040204020203" pitchFamily="34" charset="0"/>
+              </a:rPr>
+              <a:t>Сделали обоснование к вердикту сайта на уровень опасности ссылки</a:t>
+            </a:r>
+            <a:endParaRPr lang="ru-RU" altLang="en-US" dirty="0" smtClean="0">
+              <a:latin typeface="Bahnschrift" panose="020B0502040204020203" pitchFamily="34" charset="0"/>
+            </a:endParaRPr>
           </a:p>
           <a:p>
             <a:pPr marL="285750" indent="-285750">
@@ -18253,37 +18342,81 @@
               <a:rPr lang="ru-RU" sz="3500" b="1" dirty="0" smtClean="0">
                 <a:latin typeface="Bahnschrift" panose="020B0502040204020203" pitchFamily="34" charset="0"/>
               </a:rPr>
-              <a:t>С </a:t>
-            </a:r>
+              <a:t>С какими трудностями столкнулись: </a:t>
+            </a:r>
+            <a:r>
+              <a:rPr lang="ru-RU" sz="3500" dirty="0">
+                <a:latin typeface="Bahnschrift" panose="020B0502040204020203" pitchFamily="34" charset="0"/>
+              </a:rPr>
+              <a:t>Неоднозначность коротких ссылок, ложные срабатывания на легитимных сервисах, </a:t>
+            </a:r>
+            <a:r>
+              <a:rPr lang="ru-RU" sz="3500" dirty="0" err="1">
+                <a:latin typeface="Bahnschrift" panose="020B0502040204020203" pitchFamily="34" charset="0"/>
+              </a:rPr>
+              <a:t>невалидные</a:t>
+            </a:r>
+            <a:r>
+              <a:rPr lang="ru-RU" sz="3500" dirty="0">
+                <a:latin typeface="Bahnschrift" panose="020B0502040204020203" pitchFamily="34" charset="0"/>
+              </a:rPr>
+              <a:t> URL (запятые, маскировка), модель ошибалась на wikipedia.org и </a:t>
+            </a:r>
+            <a:r>
+              <a:rPr lang="ru-RU" sz="3500" dirty="0" smtClean="0">
+                <a:latin typeface="Bahnschrift" panose="020B0502040204020203" pitchFamily="34" charset="0"/>
+              </a:rPr>
+              <a:t>vk.com</a:t>
+            </a:r>
+          </a:p>
+          <a:p>
             <a:r>
               <a:rPr lang="ru-RU" sz="3500" b="1" dirty="0" smtClean="0">
                 <a:latin typeface="Bahnschrift" panose="020B0502040204020203" pitchFamily="34" charset="0"/>
               </a:rPr>
-              <a:t>какими трудностями столкнулись: </a:t>
+              <a:t>Как решили</a:t>
+            </a:r>
+            <a:r>
+              <a:rPr lang="ru-RU" sz="3500" dirty="0" smtClean="0">
+                <a:latin typeface="Bahnschrift" panose="020B0502040204020203" pitchFamily="34" charset="0"/>
+              </a:rPr>
+              <a:t>: </a:t>
             </a:r>
             <a:r>
               <a:rPr lang="ru-RU" sz="3500" dirty="0">
                 <a:latin typeface="Bahnschrift" panose="020B0502040204020203" pitchFamily="34" charset="0"/>
               </a:rPr>
-              <a:t>Неоднозначность коротких ссылок, ложные срабатывания на легитимных сервисах, </a:t>
+              <a:t>Улучшили </a:t>
             </a:r>
             <a:r>
               <a:rPr lang="ru-RU" sz="3500" dirty="0" err="1">
                 <a:latin typeface="Bahnschrift" panose="020B0502040204020203" pitchFamily="34" charset="0"/>
               </a:rPr>
-              <a:t>невалидные</a:t>
+              <a:t>валидацию</a:t>
             </a:r>
             <a:r>
               <a:rPr lang="ru-RU" sz="3500" dirty="0">
                 <a:latin typeface="Bahnschrift" panose="020B0502040204020203" pitchFamily="34" charset="0"/>
               </a:rPr>
-              <a:t> URL (запятые, маскировка), модель ошибалась на wikipedia.org и </a:t>
+              <a:t> URL, собрали отзывы пользователей для </a:t>
+            </a:r>
+            <a:r>
+              <a:rPr lang="ru-RU" sz="3500" dirty="0" err="1">
+                <a:latin typeface="Bahnschrift" panose="020B0502040204020203" pitchFamily="34" charset="0"/>
+              </a:rPr>
+              <a:t>дообучения</a:t>
+            </a:r>
+            <a:r>
+              <a:rPr lang="ru-RU" sz="3500" dirty="0">
+                <a:latin typeface="Bahnschrift" panose="020B0502040204020203" pitchFamily="34" charset="0"/>
+              </a:rPr>
+              <a:t> модели, добавили обработку краевых случаев (белый список на первых спринтах, но позже отказались в пользу чистого ML</a:t>
             </a:r>
             <a:r>
               <a:rPr lang="ru-RU" sz="3500" dirty="0" smtClean="0">
                 <a:latin typeface="Bahnschrift" panose="020B0502040204020203" pitchFamily="34" charset="0"/>
               </a:rPr>
-              <a:t>vk.com</a:t>
+              <a:t>)</a:t>
             </a:r>
           </a:p>
           <a:p>
@@ -18291,69 +18424,7 @@
               <a:rPr lang="ru-RU" sz="3500" b="1" dirty="0" smtClean="0">
                 <a:latin typeface="Bahnschrift" panose="020B0502040204020203" pitchFamily="34" charset="0"/>
               </a:rPr>
-              <a:t>Как </a:t>
-            </a:r>
-            <a:r>
-              <a:rPr lang="ru-RU" sz="3500" b="1" dirty="0" smtClean="0">
-                <a:latin typeface="Bahnschrift" panose="020B0502040204020203" pitchFamily="34" charset="0"/>
-              </a:rPr>
-              <a:t>решили</a:t>
-            </a:r>
-            <a:r>
-              <a:rPr lang="ru-RU" sz="3500" dirty="0" smtClean="0">
-                <a:latin typeface="Bahnschrift" panose="020B0502040204020203" pitchFamily="34" charset="0"/>
-              </a:rPr>
-              <a:t>: </a:t>
-            </a:r>
-            <a:r>
-              <a:rPr lang="ru-RU" sz="3500" dirty="0">
-                <a:latin typeface="Bahnschrift" panose="020B0502040204020203" pitchFamily="34" charset="0"/>
-              </a:rPr>
-              <a:t>Улучшили </a:t>
-            </a:r>
-            <a:r>
-              <a:rPr lang="ru-RU" sz="3500" dirty="0" err="1">
-                <a:latin typeface="Bahnschrift" panose="020B0502040204020203" pitchFamily="34" charset="0"/>
-              </a:rPr>
-              <a:t>валидацию</a:t>
-            </a:r>
-            <a:r>
-              <a:rPr lang="ru-RU" sz="3500" dirty="0">
-                <a:latin typeface="Bahnschrift" panose="020B0502040204020203" pitchFamily="34" charset="0"/>
-              </a:rPr>
-              <a:t> URL, собрали отзывы пользователей для </a:t>
-            </a:r>
-            <a:r>
-              <a:rPr lang="ru-RU" sz="3500" dirty="0" err="1">
-                <a:latin typeface="Bahnschrift" panose="020B0502040204020203" pitchFamily="34" charset="0"/>
-              </a:rPr>
-              <a:t>дообучения</a:t>
-            </a:r>
-            <a:r>
-              <a:rPr lang="ru-RU" sz="3500" dirty="0">
-                <a:latin typeface="Bahnschrift" panose="020B0502040204020203" pitchFamily="34" charset="0"/>
-              </a:rPr>
-              <a:t> модели, добавили обработку краевых случаев (белый список на первых спринтах, но позже отказались в пользу чистого ML</a:t>
-            </a:r>
-            <a:r>
-              <a:rPr lang="ru-RU" sz="3500" dirty="0" smtClean="0">
-                <a:latin typeface="Bahnschrift" panose="020B0502040204020203" pitchFamily="34" charset="0"/>
-              </a:rPr>
-              <a:t>)</a:t>
-            </a:r>
-          </a:p>
-          <a:p>
-            <a:r>
-              <a:rPr lang="ru-RU" sz="3500" b="1" dirty="0" smtClean="0">
-                <a:latin typeface="Bahnschrift" panose="020B0502040204020203" pitchFamily="34" charset="0"/>
-              </a:rPr>
-              <a:t>Чему </a:t>
-            </a:r>
-            <a:r>
-              <a:rPr lang="ru-RU" sz="3500" b="1" dirty="0" smtClean="0">
-                <a:latin typeface="Bahnschrift" panose="020B0502040204020203" pitchFamily="34" charset="0"/>
-              </a:rPr>
-              <a:t>научились</a:t>
+              <a:t>Чему научились</a:t>
             </a:r>
             <a:r>
               <a:rPr lang="ru-RU" sz="3500" dirty="0" smtClean="0">
@@ -19166,7 +19237,19 @@
                 </a:solidFill>
                 <a:latin typeface="Bahnschrift" panose="020B0502040204020203" pitchFamily="34" charset="0"/>
               </a:rPr>
-              <a:t> 98,1</a:t>
+              <a:t> 98,1%</a:t>
+            </a:r>
+          </a:p>
+          <a:p>
+            <a:pPr marL="214313" indent="-214313"/>
+            <a:r>
+              <a:rPr lang="en-US" altLang="en-US" dirty="0" err="1" smtClean="0">
+                <a:solidFill>
+                  <a:schemeClr val="bg1"/>
+                </a:solidFill>
+                <a:latin typeface="Bahnschrift" panose="020B0502040204020203" pitchFamily="34" charset="0"/>
+              </a:rPr>
+              <a:t>Внесены</a:t>
             </a:r>
             <a:r>
               <a:rPr lang="en-US" altLang="ru-RU" dirty="0" smtClean="0">
@@ -19175,7 +19258,142 @@
                 </a:solidFill>
                 <a:latin typeface="Bahnschrift" panose="020B0502040204020203" pitchFamily="34" charset="0"/>
               </a:rPr>
-              <a:t>%</a:t>
+              <a:t> </a:t>
+            </a:r>
+            <a:r>
+              <a:rPr lang="en-US" altLang="en-US" dirty="0" err="1" smtClean="0">
+                <a:solidFill>
+                  <a:schemeClr val="bg1"/>
+                </a:solidFill>
+                <a:latin typeface="Bahnschrift" panose="020B0502040204020203" pitchFamily="34" charset="0"/>
+              </a:rPr>
+              <a:t>дополнительные</a:t>
+            </a:r>
+            <a:r>
+              <a:rPr lang="en-US" altLang="ru-RU" dirty="0" smtClean="0">
+                <a:solidFill>
+                  <a:schemeClr val="bg1"/>
+                </a:solidFill>
+                <a:latin typeface="Bahnschrift" panose="020B0502040204020203" pitchFamily="34" charset="0"/>
+              </a:rPr>
+              <a:t> </a:t>
+            </a:r>
+            <a:r>
+              <a:rPr lang="en-US" altLang="en-US" dirty="0" err="1" smtClean="0">
+                <a:solidFill>
+                  <a:schemeClr val="bg1"/>
+                </a:solidFill>
+                <a:latin typeface="Bahnschrift" panose="020B0502040204020203" pitchFamily="34" charset="0"/>
+              </a:rPr>
+              <a:t>безопасные</a:t>
+            </a:r>
+            <a:r>
+              <a:rPr lang="en-US" altLang="ru-RU" dirty="0" smtClean="0">
+                <a:solidFill>
+                  <a:schemeClr val="bg1"/>
+                </a:solidFill>
+                <a:latin typeface="Bahnschrift" panose="020B0502040204020203" pitchFamily="34" charset="0"/>
+              </a:rPr>
+              <a:t> </a:t>
+            </a:r>
+            <a:r>
+              <a:rPr lang="en-US" altLang="en-US" dirty="0" smtClean="0">
+                <a:solidFill>
+                  <a:schemeClr val="bg1"/>
+                </a:solidFill>
+                <a:latin typeface="Bahnschrift" panose="020B0502040204020203" pitchFamily="34" charset="0"/>
+              </a:rPr>
+              <a:t>и</a:t>
+            </a:r>
+            <a:r>
+              <a:rPr lang="en-US" altLang="ru-RU" dirty="0" smtClean="0">
+                <a:solidFill>
+                  <a:schemeClr val="bg1"/>
+                </a:solidFill>
+                <a:latin typeface="Bahnschrift" panose="020B0502040204020203" pitchFamily="34" charset="0"/>
+              </a:rPr>
+              <a:t> </a:t>
+            </a:r>
+            <a:r>
+              <a:rPr lang="en-US" altLang="en-US" dirty="0" err="1" smtClean="0">
+                <a:solidFill>
+                  <a:schemeClr val="bg1"/>
+                </a:solidFill>
+                <a:latin typeface="Bahnschrift" panose="020B0502040204020203" pitchFamily="34" charset="0"/>
+              </a:rPr>
+              <a:t>опасные</a:t>
+            </a:r>
+            <a:r>
+              <a:rPr lang="en-US" altLang="ru-RU" dirty="0" smtClean="0">
+                <a:solidFill>
+                  <a:schemeClr val="bg1"/>
+                </a:solidFill>
+                <a:latin typeface="Bahnschrift" panose="020B0502040204020203" pitchFamily="34" charset="0"/>
+              </a:rPr>
+              <a:t> </a:t>
+            </a:r>
+            <a:r>
+              <a:rPr lang="en-US" altLang="en-US" dirty="0" err="1" smtClean="0">
+                <a:solidFill>
+                  <a:schemeClr val="bg1"/>
+                </a:solidFill>
+                <a:latin typeface="Bahnschrift" panose="020B0502040204020203" pitchFamily="34" charset="0"/>
+              </a:rPr>
+              <a:t>примеры</a:t>
+            </a:r>
+            <a:r>
+              <a:rPr lang="en-US" altLang="ru-RU" dirty="0" smtClean="0">
+                <a:solidFill>
+                  <a:schemeClr val="bg1"/>
+                </a:solidFill>
+                <a:latin typeface="Bahnschrift" panose="020B0502040204020203" pitchFamily="34" charset="0"/>
+              </a:rPr>
+              <a:t> </a:t>
+            </a:r>
+            <a:r>
+              <a:rPr lang="en-US" altLang="en-US" dirty="0" err="1" smtClean="0">
+                <a:solidFill>
+                  <a:schemeClr val="bg1"/>
+                </a:solidFill>
+                <a:latin typeface="Bahnschrift" panose="020B0502040204020203" pitchFamily="34" charset="0"/>
+              </a:rPr>
+              <a:t>для</a:t>
+            </a:r>
+            <a:r>
+              <a:rPr lang="en-US" altLang="ru-RU" dirty="0" smtClean="0">
+                <a:solidFill>
+                  <a:schemeClr val="bg1"/>
+                </a:solidFill>
+                <a:latin typeface="Bahnschrift" panose="020B0502040204020203" pitchFamily="34" charset="0"/>
+              </a:rPr>
+              <a:t> </a:t>
+            </a:r>
+            <a:r>
+              <a:rPr lang="en-US" altLang="en-US" dirty="0" err="1" smtClean="0">
+                <a:solidFill>
+                  <a:schemeClr val="bg1"/>
+                </a:solidFill>
+                <a:latin typeface="Bahnschrift" panose="020B0502040204020203" pitchFamily="34" charset="0"/>
+              </a:rPr>
+              <a:t>улучшения</a:t>
+            </a:r>
+            <a:r>
+              <a:rPr lang="en-US" altLang="ru-RU" dirty="0" smtClean="0">
+                <a:solidFill>
+                  <a:schemeClr val="bg1"/>
+                </a:solidFill>
+                <a:latin typeface="Bahnschrift" panose="020B0502040204020203" pitchFamily="34" charset="0"/>
+              </a:rPr>
+              <a:t> </a:t>
+            </a:r>
+            <a:r>
+              <a:rPr lang="en-US" altLang="en-US" dirty="0" err="1" smtClean="0">
+                <a:solidFill>
+                  <a:schemeClr val="bg1"/>
+                </a:solidFill>
+                <a:latin typeface="Bahnschrift" panose="020B0502040204020203" pitchFamily="34" charset="0"/>
+              </a:rPr>
+              <a:t>обобщения</a:t>
             </a:r>
             <a:endParaRPr lang="en-US" altLang="ru-RU" dirty="0" smtClean="0">
               <a:solidFill>
@@ -19185,7 +19403,45 @@
             </a:endParaRPr>
           </a:p>
           <a:p>
-            <a:pPr marL="214313" indent="-214313"/>
+            <a:pPr marL="0" indent="0">
+              <a:buNone/>
+            </a:pPr>
+            <a:r>
+              <a:rPr lang="en-US" altLang="en-US" sz="3300" b="1" dirty="0" err="1" smtClean="0">
+                <a:solidFill>
+                  <a:schemeClr val="bg1"/>
+                </a:solidFill>
+                <a:latin typeface="Bahnschrift" panose="020B0502040204020203" pitchFamily="34" charset="0"/>
+              </a:rPr>
+              <a:t>Роль</a:t>
+            </a:r>
+            <a:r>
+              <a:rPr lang="en-US" altLang="ru-RU" sz="3300" b="1" dirty="0" smtClean="0">
+                <a:solidFill>
+                  <a:schemeClr val="bg1"/>
+                </a:solidFill>
+                <a:latin typeface="Bahnschrift" panose="020B0502040204020203" pitchFamily="34" charset="0"/>
+              </a:rPr>
+              <a:t> 2: Data-</a:t>
+            </a:r>
+            <a:r>
+              <a:rPr lang="en-US" altLang="en-US" sz="3300" b="1" dirty="0" err="1" smtClean="0">
+                <a:solidFill>
+                  <a:schemeClr val="bg1"/>
+                </a:solidFill>
+                <a:latin typeface="Bahnschrift" panose="020B0502040204020203" pitchFamily="34" charset="0"/>
+              </a:rPr>
+              <a:t>инженер</a:t>
+            </a:r>
+            <a:endParaRPr lang="en-US" altLang="en-US" sz="3300" b="1" dirty="0" smtClean="0">
+              <a:solidFill>
+                <a:schemeClr val="bg1"/>
+              </a:solidFill>
+              <a:latin typeface="Bahnschrift" panose="020B0502040204020203" pitchFamily="34" charset="0"/>
+            </a:endParaRPr>
+          </a:p>
+          <a:p>
+            <a:pPr marL="257175" indent="-257175"/>
             <a:r>
               <a:rPr lang="en-US" altLang="en-US" dirty="0" err="1" smtClean="0">
                 <a:solidFill>
@@ -19193,7 +19449,7 @@
                 </a:solidFill>
                 <a:latin typeface="Bahnschrift" panose="020B0502040204020203" pitchFamily="34" charset="0"/>
               </a:rPr>
-              <a:t>Внесены</a:t>
+              <a:t>Собраны</a:t>
             </a:r>
             <a:r>
               <a:rPr lang="en-US" altLang="ru-RU" dirty="0" smtClean="0">
@@ -19205,13 +19461,31 @@
               <a:t> </a:t>
             </a:r>
             <a:r>
+              <a:rPr lang="en-US" altLang="en-US" dirty="0" smtClean="0">
+                <a:solidFill>
+                  <a:schemeClr val="bg1"/>
+                </a:solidFill>
+                <a:latin typeface="Bahnschrift" panose="020B0502040204020203" pitchFamily="34" charset="0"/>
+              </a:rPr>
+              <a:t>и</a:t>
+            </a:r>
+            <a:r>
+              <a:rPr lang="en-US" altLang="ru-RU" dirty="0" smtClean="0">
+                <a:solidFill>
+                  <a:schemeClr val="bg1"/>
+                </a:solidFill>
+                <a:latin typeface="Bahnschrift" panose="020B0502040204020203" pitchFamily="34" charset="0"/>
+              </a:rPr>
+              <a:t> </a:t>
+            </a:r>
+            <a:r>
               <a:rPr lang="en-US" altLang="en-US" dirty="0" err="1" smtClean="0">
                 <a:solidFill>
                   <a:schemeClr val="bg1"/>
                 </a:solidFill>
                 <a:latin typeface="Bahnschrift" panose="020B0502040204020203" pitchFamily="34" charset="0"/>
               </a:rPr>
-              <a:t>дополнительные</a:t>
+              <a:t>очищены</a:t>
             </a:r>
             <a:r>
               <a:rPr lang="en-US" altLang="ru-RU" dirty="0" smtClean="0">
@@ -19229,7 +19503,7 @@
                 </a:solidFill>
                 <a:latin typeface="Bahnschrift" panose="020B0502040204020203" pitchFamily="34" charset="0"/>
               </a:rPr>
-              <a:t>безопасные</a:t>
+              <a:t>датасеты</a:t>
             </a:r>
             <a:r>
               <a:rPr lang="en-US" altLang="ru-RU" dirty="0" smtClean="0">
@@ -19241,6 +19515,24 @@
               <a:t> </a:t>
             </a:r>
             <a:r>
+              <a:rPr lang="en-US" altLang="en-US" dirty="0" err="1" smtClean="0">
+                <a:solidFill>
+                  <a:schemeClr val="bg1"/>
+                </a:solidFill>
+                <a:latin typeface="Bahnschrift" panose="020B0502040204020203" pitchFamily="34" charset="0"/>
+              </a:rPr>
+              <a:t>фишинговых</a:t>
+            </a:r>
+            <a:r>
+              <a:rPr lang="en-US" altLang="ru-RU" dirty="0" smtClean="0">
+                <a:solidFill>
+                  <a:schemeClr val="bg1"/>
+                </a:solidFill>
+                <a:latin typeface="Bahnschrift" panose="020B0502040204020203" pitchFamily="34" charset="0"/>
+              </a:rPr>
+              <a:t> </a:t>
+            </a:r>
+            <a:r>
               <a:rPr lang="en-US" altLang="en-US" dirty="0" smtClean="0">
                 <a:solidFill>
                   <a:schemeClr val="bg1"/>
@@ -19265,7 +19557,7 @@
                 </a:solidFill>
                 <a:latin typeface="Bahnschrift" panose="020B0502040204020203" pitchFamily="34" charset="0"/>
               </a:rPr>
-              <a:t>опасные</a:t>
+              <a:t>легитимных</a:t>
             </a:r>
             <a:r>
               <a:rPr lang="en-US" altLang="ru-RU" dirty="0" smtClean="0">
@@ -19274,6 +19566,24 @@
                 </a:solidFill>
                 <a:latin typeface="Bahnschrift" panose="020B0502040204020203" pitchFamily="34" charset="0"/>
               </a:rPr>
+              <a:t> URL, </a:t>
+            </a:r>
+            <a:r>
+              <a:rPr lang="en-US" altLang="en-US" dirty="0" err="1" smtClean="0">
+                <a:solidFill>
+                  <a:schemeClr val="bg1"/>
+                </a:solidFill>
+                <a:latin typeface="Bahnschrift" panose="020B0502040204020203" pitchFamily="34" charset="0"/>
+              </a:rPr>
+              <a:t>удалены</a:t>
+            </a:r>
+            <a:r>
+              <a:rPr lang="en-US" altLang="ru-RU" dirty="0" smtClean="0">
+                <a:solidFill>
+                  <a:schemeClr val="bg1"/>
+                </a:solidFill>
+                <a:latin typeface="Bahnschrift" panose="020B0502040204020203" pitchFamily="34" charset="0"/>
+              </a:rPr>
               <a:t> </a:t>
             </a:r>
             <a:r>
@@ -19283,7 +19593,7 @@
                 </a:solidFill>
                 <a:latin typeface="Bahnschrift" panose="020B0502040204020203" pitchFamily="34" charset="0"/>
               </a:rPr>
-              <a:t>примеры</a:t>
+              <a:t>дубликаты</a:t>
             </a:r>
             <a:r>
               <a:rPr lang="en-US" altLang="ru-RU" dirty="0" smtClean="0">
@@ -19292,6 +19602,24 @@
                 </a:solidFill>
                 <a:latin typeface="Bahnschrift" panose="020B0502040204020203" pitchFamily="34" charset="0"/>
               </a:rPr>
+              <a:t>, </a:t>
+            </a:r>
+            <a:r>
+              <a:rPr lang="en-US" altLang="en-US" dirty="0" err="1" smtClean="0">
+                <a:solidFill>
+                  <a:schemeClr val="bg1"/>
+                </a:solidFill>
+                <a:latin typeface="Bahnschrift" panose="020B0502040204020203" pitchFamily="34" charset="0"/>
+              </a:rPr>
+              <a:t>нормализованы</a:t>
+            </a:r>
+            <a:r>
+              <a:rPr lang="en-US" altLang="ru-RU" dirty="0" smtClean="0">
+                <a:solidFill>
+                  <a:schemeClr val="bg1"/>
+                </a:solidFill>
+                <a:latin typeface="Bahnschrift" panose="020B0502040204020203" pitchFamily="34" charset="0"/>
+              </a:rPr>
               <a:t> </a:t>
             </a:r>
             <a:r>
@@ -19301,43 +19629,7 @@
                 </a:solidFill>
                 <a:latin typeface="Bahnschrift" panose="020B0502040204020203" pitchFamily="34" charset="0"/>
               </a:rPr>
-              <a:t>для</a:t>
-            </a:r>
-            <a:r>
-              <a:rPr lang="en-US" altLang="ru-RU" dirty="0" smtClean="0">
-                <a:solidFill>
-                  <a:schemeClr val="bg1"/>
-                </a:solidFill>
-                <a:latin typeface="Bahnschrift" panose="020B0502040204020203" pitchFamily="34" charset="0"/>
-              </a:rPr>
-              <a:t> </a:t>
-            </a:r>
-            <a:r>
-              <a:rPr lang="en-US" altLang="en-US" dirty="0" err="1" smtClean="0">
-                <a:solidFill>
-                  <a:schemeClr val="bg1"/>
-                </a:solidFill>
-                <a:latin typeface="Bahnschrift" panose="020B0502040204020203" pitchFamily="34" charset="0"/>
-              </a:rPr>
-              <a:t>улучшения</a:t>
-            </a:r>
-            <a:r>
-              <a:rPr lang="en-US" altLang="ru-RU" dirty="0" smtClean="0">
-                <a:solidFill>
-                  <a:schemeClr val="bg1"/>
-                </a:solidFill>
-                <a:latin typeface="Bahnschrift" panose="020B0502040204020203" pitchFamily="34" charset="0"/>
-              </a:rPr>
-              <a:t> </a:t>
-            </a:r>
-            <a:r>
-              <a:rPr lang="en-US" altLang="en-US" dirty="0" err="1" smtClean="0">
-                <a:solidFill>
-                  <a:schemeClr val="bg1"/>
-                </a:solidFill>
-                <a:latin typeface="Bahnschrift" panose="020B0502040204020203" pitchFamily="34" charset="0"/>
-              </a:rPr>
-              <a:t>обобщения</a:t>
+              <a:t>форматы</a:t>
             </a:r>
             <a:endParaRPr lang="en-US" altLang="ru-RU" dirty="0" smtClean="0">
               <a:solidFill>
@@ -19347,53 +19639,69 @@
             </a:endParaRPr>
           </a:p>
           <a:p>
-            <a:pPr marL="0" indent="0">
-              <a:buNone/>
-            </a:pPr>
-            <a:r>
-              <a:rPr lang="en-US" altLang="en-US" sz="3300" b="1" dirty="0" err="1" smtClean="0">
-                <a:solidFill>
-                  <a:schemeClr val="bg1"/>
-                </a:solidFill>
-                <a:latin typeface="Bahnschrift" panose="020B0502040204020203" pitchFamily="34" charset="0"/>
-              </a:rPr>
-              <a:t>Роль</a:t>
-            </a:r>
-            <a:r>
-              <a:rPr lang="en-US" altLang="ru-RU" sz="3300" b="1" dirty="0" smtClean="0">
-                <a:solidFill>
-                  <a:schemeClr val="bg1"/>
-                </a:solidFill>
-                <a:latin typeface="Bahnschrift" panose="020B0502040204020203" pitchFamily="34" charset="0"/>
-              </a:rPr>
-              <a:t> 2: Data-</a:t>
-            </a:r>
-            <a:r>
-              <a:rPr lang="en-US" altLang="en-US" sz="3300" b="1" dirty="0" err="1" smtClean="0">
-                <a:solidFill>
-                  <a:schemeClr val="bg1"/>
-                </a:solidFill>
-                <a:latin typeface="Bahnschrift" panose="020B0502040204020203" pitchFamily="34" charset="0"/>
-              </a:rPr>
-              <a:t>инженер</a:t>
-            </a:r>
-            <a:endParaRPr lang="en-US" altLang="en-US" sz="3300" b="1" dirty="0" smtClean="0">
-              <a:solidFill>
-                <a:schemeClr val="bg1"/>
-              </a:solidFill>
-              <a:latin typeface="Bahnschrift" panose="020B0502040204020203" pitchFamily="34" charset="0"/>
-            </a:endParaRPr>
-          </a:p>
-          <a:p>
             <a:pPr marL="257175" indent="-257175"/>
             <a:r>
+              <a:rPr lang="en-US" altLang="en-US" b="1" dirty="0" err="1" smtClean="0">
+                <a:solidFill>
+                  <a:schemeClr val="bg1"/>
+                </a:solidFill>
+                <a:latin typeface="Bahnschrift" panose="020B0502040204020203" pitchFamily="34" charset="0"/>
+              </a:rPr>
+              <a:t>Настроена</a:t>
+            </a:r>
+            <a:r>
+              <a:rPr lang="en-US" altLang="ru-RU" b="1" dirty="0" smtClean="0">
+                <a:solidFill>
+                  <a:schemeClr val="bg1"/>
+                </a:solidFill>
+                <a:latin typeface="Bahnschrift" panose="020B0502040204020203" pitchFamily="34" charset="0"/>
+              </a:rPr>
+              <a:t> </a:t>
+            </a:r>
+            <a:r>
+              <a:rPr lang="en-US" altLang="en-US" b="1" dirty="0" err="1" smtClean="0">
+                <a:solidFill>
+                  <a:schemeClr val="bg1"/>
+                </a:solidFill>
+                <a:latin typeface="Bahnschrift" panose="020B0502040204020203" pitchFamily="34" charset="0"/>
+              </a:rPr>
+              <a:t>база</a:t>
+            </a:r>
+            <a:r>
+              <a:rPr lang="en-US" altLang="ru-RU" b="1" dirty="0" smtClean="0">
+                <a:solidFill>
+                  <a:schemeClr val="bg1"/>
+                </a:solidFill>
+                <a:latin typeface="Bahnschrift" panose="020B0502040204020203" pitchFamily="34" charset="0"/>
+              </a:rPr>
+              <a:t> </a:t>
+            </a:r>
+            <a:r>
+              <a:rPr lang="en-US" altLang="en-US" b="1" dirty="0" err="1" smtClean="0">
+                <a:solidFill>
+                  <a:schemeClr val="bg1"/>
+                </a:solidFill>
+                <a:latin typeface="Bahnschrift" panose="020B0502040204020203" pitchFamily="34" charset="0"/>
+              </a:rPr>
+              <a:t>данных</a:t>
+            </a:r>
+            <a:r>
+              <a:rPr lang="en-US" altLang="ru-RU" b="1" dirty="0" smtClean="0">
+                <a:solidFill>
+                  <a:schemeClr val="bg1"/>
+                </a:solidFill>
+                <a:latin typeface="Bahnschrift" panose="020B0502040204020203" pitchFamily="34" charset="0"/>
+              </a:rPr>
+              <a:t> SQLite </a:t>
+            </a:r>
+            <a:r>
               <a:rPr lang="en-US" altLang="en-US" dirty="0" err="1" smtClean="0">
                 <a:solidFill>
                   <a:schemeClr val="bg1"/>
                 </a:solidFill>
                 <a:latin typeface="Bahnschrift" panose="020B0502040204020203" pitchFamily="34" charset="0"/>
               </a:rPr>
-              <a:t>Собраны</a:t>
+              <a:t>для</a:t>
             </a:r>
             <a:r>
               <a:rPr lang="en-US" altLang="ru-RU" dirty="0" smtClean="0">
@@ -19405,13 +19713,223 @@
               <a:t> </a:t>
             </a:r>
             <a:r>
+              <a:rPr lang="en-US" altLang="en-US" dirty="0" err="1" smtClean="0">
+                <a:solidFill>
+                  <a:schemeClr val="bg1"/>
+                </a:solidFill>
+                <a:latin typeface="Bahnschrift" panose="020B0502040204020203" pitchFamily="34" charset="0"/>
+              </a:rPr>
+              <a:t>хранения</a:t>
+            </a:r>
+            <a:r>
+              <a:rPr lang="en-US" altLang="ru-RU" dirty="0" smtClean="0">
+                <a:solidFill>
+                  <a:schemeClr val="bg1"/>
+                </a:solidFill>
+                <a:latin typeface="Bahnschrift" panose="020B0502040204020203" pitchFamily="34" charset="0"/>
+              </a:rPr>
+              <a:t> </a:t>
+            </a:r>
+            <a:r>
+              <a:rPr lang="en-US" altLang="en-US" dirty="0" err="1" smtClean="0">
+                <a:solidFill>
+                  <a:schemeClr val="bg1"/>
+                </a:solidFill>
+                <a:latin typeface="Bahnschrift" panose="020B0502040204020203" pitchFamily="34" charset="0"/>
+              </a:rPr>
+              <a:t>обратной</a:t>
+            </a:r>
+            <a:r>
+              <a:rPr lang="en-US" altLang="ru-RU" dirty="0" smtClean="0">
+                <a:solidFill>
+                  <a:schemeClr val="bg1"/>
+                </a:solidFill>
+                <a:latin typeface="Bahnschrift" panose="020B0502040204020203" pitchFamily="34" charset="0"/>
+              </a:rPr>
+              <a:t> </a:t>
+            </a:r>
+            <a:r>
+              <a:rPr lang="en-US" altLang="en-US" dirty="0" err="1" smtClean="0">
+                <a:solidFill>
+                  <a:schemeClr val="bg1"/>
+                </a:solidFill>
+                <a:latin typeface="Bahnschrift" panose="020B0502040204020203" pitchFamily="34" charset="0"/>
+              </a:rPr>
+              <a:t>связи</a:t>
+            </a:r>
+            <a:r>
+              <a:rPr lang="en-US" altLang="ru-RU" dirty="0" smtClean="0">
+                <a:solidFill>
+                  <a:schemeClr val="bg1"/>
+                </a:solidFill>
+                <a:latin typeface="Bahnschrift" panose="020B0502040204020203" pitchFamily="34" charset="0"/>
+              </a:rPr>
+              <a:t> </a:t>
+            </a:r>
+            <a:r>
+              <a:rPr lang="en-US" altLang="en-US" dirty="0" err="1" smtClean="0">
+                <a:solidFill>
+                  <a:schemeClr val="bg1"/>
+                </a:solidFill>
+                <a:latin typeface="Bahnschrift" panose="020B0502040204020203" pitchFamily="34" charset="0"/>
+              </a:rPr>
+              <a:t>от</a:t>
+            </a:r>
+            <a:r>
+              <a:rPr lang="en-US" altLang="ru-RU" dirty="0" smtClean="0">
+                <a:solidFill>
+                  <a:schemeClr val="bg1"/>
+                </a:solidFill>
+                <a:latin typeface="Bahnschrift" panose="020B0502040204020203" pitchFamily="34" charset="0"/>
+              </a:rPr>
+              <a:t> </a:t>
+            </a:r>
+            <a:r>
+              <a:rPr lang="en-US" altLang="en-US" dirty="0" err="1" smtClean="0">
+                <a:solidFill>
+                  <a:schemeClr val="bg1"/>
+                </a:solidFill>
+                <a:latin typeface="Bahnschrift" panose="020B0502040204020203" pitchFamily="34" charset="0"/>
+              </a:rPr>
+              <a:t>пользователей</a:t>
+            </a:r>
+            <a:r>
+              <a:rPr lang="en-US" altLang="ru-RU" dirty="0" smtClean="0">
+                <a:solidFill>
+                  <a:schemeClr val="bg1"/>
+                </a:solidFill>
+                <a:latin typeface="Bahnschrift" panose="020B0502040204020203" pitchFamily="34" charset="0"/>
+              </a:rPr>
+              <a:t> (</a:t>
+            </a:r>
+            <a:r>
+              <a:rPr lang="en-US" altLang="en-US" dirty="0" err="1" smtClean="0">
+                <a:solidFill>
+                  <a:schemeClr val="bg1"/>
+                </a:solidFill>
+                <a:latin typeface="Bahnschrift" panose="020B0502040204020203" pitchFamily="34" charset="0"/>
+              </a:rPr>
+              <a:t>таблица</a:t>
+            </a:r>
+            <a:r>
+              <a:rPr lang="en-US" altLang="ru-RU" dirty="0" smtClean="0">
+                <a:solidFill>
+                  <a:schemeClr val="bg1"/>
+                </a:solidFill>
+                <a:latin typeface="Bahnschrift" panose="020B0502040204020203" pitchFamily="34" charset="0"/>
+              </a:rPr>
+              <a:t> feedbacks)</a:t>
+            </a:r>
+          </a:p>
+          <a:p>
+            <a:pPr marL="257175" indent="-257175"/>
+            <a:r>
+              <a:rPr lang="en-US" altLang="en-US" b="1" dirty="0" err="1" smtClean="0">
+                <a:solidFill>
+                  <a:schemeClr val="bg1"/>
+                </a:solidFill>
+                <a:latin typeface="Bahnschrift" panose="020B0502040204020203" pitchFamily="34" charset="0"/>
+              </a:rPr>
+              <a:t>Организовано</a:t>
+            </a:r>
+            <a:r>
+              <a:rPr lang="en-US" altLang="ru-RU" b="1" dirty="0" smtClean="0">
+                <a:solidFill>
+                  <a:schemeClr val="bg1"/>
+                </a:solidFill>
+                <a:latin typeface="Bahnschrift" panose="020B0502040204020203" pitchFamily="34" charset="0"/>
+              </a:rPr>
+              <a:t> </a:t>
+            </a:r>
+            <a:r>
+              <a:rPr lang="en-US" altLang="en-US" b="1" dirty="0" err="1" smtClean="0">
+                <a:solidFill>
+                  <a:schemeClr val="bg1"/>
+                </a:solidFill>
+                <a:latin typeface="Bahnschrift" panose="020B0502040204020203" pitchFamily="34" charset="0"/>
+              </a:rPr>
+              <a:t>версионирование</a:t>
+            </a:r>
+            <a:r>
+              <a:rPr lang="en-US" altLang="ru-RU" b="1" dirty="0" smtClean="0">
+                <a:solidFill>
+                  <a:schemeClr val="bg1"/>
+                </a:solidFill>
+                <a:latin typeface="Bahnschrift" panose="020B0502040204020203" pitchFamily="34" charset="0"/>
+              </a:rPr>
+              <a:t> </a:t>
+            </a:r>
+            <a:r>
+              <a:rPr lang="en-US" altLang="en-US" b="1" dirty="0" err="1" smtClean="0">
+                <a:solidFill>
+                  <a:schemeClr val="bg1"/>
+                </a:solidFill>
+                <a:latin typeface="Bahnschrift" panose="020B0502040204020203" pitchFamily="34" charset="0"/>
+              </a:rPr>
+              <a:t>датасетов</a:t>
+            </a:r>
+            <a:r>
+              <a:rPr lang="en-US" altLang="ru-RU" b="1" dirty="0" smtClean="0">
+                <a:solidFill>
+                  <a:schemeClr val="bg1"/>
+                </a:solidFill>
+                <a:latin typeface="Bahnschrift" panose="020B0502040204020203" pitchFamily="34" charset="0"/>
+              </a:rPr>
+              <a:t>:</a:t>
+            </a:r>
+            <a:r>
+              <a:rPr lang="en-US" altLang="ru-RU" dirty="0" smtClean="0">
+                <a:solidFill>
+                  <a:schemeClr val="bg1"/>
+                </a:solidFill>
+                <a:latin typeface="Bahnschrift" panose="020B0502040204020203" pitchFamily="34" charset="0"/>
+              </a:rPr>
+              <a:t> </a:t>
+            </a:r>
+            <a:r>
+              <a:rPr lang="en-US" altLang="en-US" dirty="0" err="1" smtClean="0">
+                <a:solidFill>
+                  <a:schemeClr val="bg1"/>
+                </a:solidFill>
+                <a:latin typeface="Bahnschrift" panose="020B0502040204020203" pitchFamily="34" charset="0"/>
+              </a:rPr>
+              <a:t>сохранение</a:t>
+            </a:r>
+            <a:r>
+              <a:rPr lang="en-US" altLang="ru-RU" dirty="0" smtClean="0">
+                <a:solidFill>
+                  <a:schemeClr val="bg1"/>
+                </a:solidFill>
+                <a:latin typeface="Bahnschrift" panose="020B0502040204020203" pitchFamily="34" charset="0"/>
+              </a:rPr>
+              <a:t> </a:t>
+            </a:r>
+            <a:r>
+              <a:rPr lang="en-US" altLang="en-US" dirty="0" err="1" smtClean="0">
+                <a:solidFill>
+                  <a:schemeClr val="bg1"/>
+                </a:solidFill>
+                <a:latin typeface="Bahnschrift" panose="020B0502040204020203" pitchFamily="34" charset="0"/>
+              </a:rPr>
+              <a:t>метаданных</a:t>
+            </a:r>
+            <a:r>
+              <a:rPr lang="en-US" altLang="ru-RU" dirty="0" smtClean="0">
+                <a:solidFill>
+                  <a:schemeClr val="bg1"/>
+                </a:solidFill>
+                <a:latin typeface="Bahnschrift" panose="020B0502040204020203" pitchFamily="34" charset="0"/>
+              </a:rPr>
+              <a:t> </a:t>
+            </a:r>
+            <a:r>
               <a:rPr lang="en-US" altLang="en-US" dirty="0" smtClean="0">
                 <a:solidFill>
                   <a:schemeClr val="bg1"/>
                 </a:solidFill>
                 <a:latin typeface="Bahnschrift" panose="020B0502040204020203" pitchFamily="34" charset="0"/>
               </a:rPr>
-              <a:t>и</a:t>
+              <a:t>в</a:t>
             </a:r>
             <a:r>
               <a:rPr lang="en-US" altLang="ru-RU" dirty="0" smtClean="0">
@@ -19420,6 +19938,24 @@
                 </a:solidFill>
                 <a:latin typeface="Bahnschrift" panose="020B0502040204020203" pitchFamily="34" charset="0"/>
               </a:rPr>
+              <a:t> JSON, </a:t>
+            </a:r>
+            <a:r>
+              <a:rPr lang="en-US" altLang="en-US" dirty="0" err="1" smtClean="0">
+                <a:solidFill>
+                  <a:schemeClr val="bg1"/>
+                </a:solidFill>
+                <a:latin typeface="Bahnschrift" panose="020B0502040204020203" pitchFamily="34" charset="0"/>
+              </a:rPr>
+              <a:t>поддержка</a:t>
+            </a:r>
+            <a:r>
+              <a:rPr lang="en-US" altLang="ru-RU" dirty="0" smtClean="0">
+                <a:solidFill>
+                  <a:schemeClr val="bg1"/>
+                </a:solidFill>
+                <a:latin typeface="Bahnschrift" panose="020B0502040204020203" pitchFamily="34" charset="0"/>
+              </a:rPr>
               <a:t> </a:t>
             </a:r>
             <a:r>
@@ -19429,7 +19965,7 @@
                 </a:solidFill>
                 <a:latin typeface="Bahnschrift" panose="020B0502040204020203" pitchFamily="34" charset="0"/>
               </a:rPr>
-              <a:t>очищены</a:t>
+              <a:t>актуальной</a:t>
             </a:r>
             <a:r>
               <a:rPr lang="en-US" altLang="ru-RU" dirty="0" smtClean="0">
@@ -19447,7 +19983,7 @@
                 </a:solidFill>
                 <a:latin typeface="Bahnschrift" panose="020B0502040204020203" pitchFamily="34" charset="0"/>
               </a:rPr>
-              <a:t>датасеты</a:t>
+              <a:t>версии</a:t>
             </a:r>
             <a:r>
               <a:rPr lang="en-US" altLang="ru-RU" dirty="0" smtClean="0">
@@ -19456,518 +19992,8 @@
                 </a:solidFill>
                 <a:latin typeface="Bahnschrift" panose="020B0502040204020203" pitchFamily="34" charset="0"/>
               </a:rPr>
-              <a:t> </a:t>
-            </a:r>
-            <a:r>
-              <a:rPr lang="en-US" altLang="en-US" dirty="0" err="1" smtClean="0">
-                <a:solidFill>
-                  <a:schemeClr val="bg1"/>
-                </a:solidFill>
-                <a:latin typeface="Bahnschrift" panose="020B0502040204020203" pitchFamily="34" charset="0"/>
-              </a:rPr>
-              <a:t>фишинговых</a:t>
-            </a:r>
-            <a:r>
-              <a:rPr lang="en-US" altLang="ru-RU" dirty="0" smtClean="0">
-                <a:solidFill>
-                  <a:schemeClr val="bg1"/>
-                </a:solidFill>
-                <a:latin typeface="Bahnschrift" panose="020B0502040204020203" pitchFamily="34" charset="0"/>
-              </a:rPr>
-              <a:t> </a:t>
-            </a:r>
-            <a:r>
-              <a:rPr lang="en-US" altLang="en-US" dirty="0" smtClean="0">
-                <a:solidFill>
-                  <a:schemeClr val="bg1"/>
-                </a:solidFill>
-                <a:latin typeface="Bahnschrift" panose="020B0502040204020203" pitchFamily="34" charset="0"/>
-              </a:rPr>
-              <a:t>и</a:t>
-            </a:r>
-            <a:r>
-              <a:rPr lang="en-US" altLang="ru-RU" dirty="0" smtClean="0">
-                <a:solidFill>
-                  <a:schemeClr val="bg1"/>
-                </a:solidFill>
-                <a:latin typeface="Bahnschrift" panose="020B0502040204020203" pitchFamily="34" charset="0"/>
-              </a:rPr>
-              <a:t> </a:t>
-            </a:r>
-            <a:r>
-              <a:rPr lang="en-US" altLang="en-US" dirty="0" err="1" smtClean="0">
-                <a:solidFill>
-                  <a:schemeClr val="bg1"/>
-                </a:solidFill>
-                <a:latin typeface="Bahnschrift" panose="020B0502040204020203" pitchFamily="34" charset="0"/>
-              </a:rPr>
-              <a:t>легитимных</a:t>
-            </a:r>
-            <a:r>
-              <a:rPr lang="en-US" altLang="ru-RU" dirty="0" smtClean="0">
-                <a:solidFill>
-                  <a:schemeClr val="bg1"/>
-                </a:solidFill>
-                <a:latin typeface="Bahnschrift" panose="020B0502040204020203" pitchFamily="34" charset="0"/>
-              </a:rPr>
-              <a:t> URL, </a:t>
-            </a:r>
-            <a:r>
-              <a:rPr lang="en-US" altLang="en-US" dirty="0" err="1" smtClean="0">
-                <a:solidFill>
-                  <a:schemeClr val="bg1"/>
-                </a:solidFill>
-                <a:latin typeface="Bahnschrift" panose="020B0502040204020203" pitchFamily="34" charset="0"/>
-              </a:rPr>
-              <a:t>удалены</a:t>
-            </a:r>
-            <a:r>
-              <a:rPr lang="en-US" altLang="ru-RU" dirty="0" smtClean="0">
-                <a:solidFill>
-                  <a:schemeClr val="bg1"/>
-                </a:solidFill>
-                <a:latin typeface="Bahnschrift" panose="020B0502040204020203" pitchFamily="34" charset="0"/>
-              </a:rPr>
-              <a:t> </a:t>
-            </a:r>
-            <a:r>
-              <a:rPr lang="en-US" altLang="en-US" dirty="0" err="1" smtClean="0">
-                <a:solidFill>
-                  <a:schemeClr val="bg1"/>
-                </a:solidFill>
-                <a:latin typeface="Bahnschrift" panose="020B0502040204020203" pitchFamily="34" charset="0"/>
-              </a:rPr>
-              <a:t>дубликаты</a:t>
-            </a:r>
-            <a:r>
-              <a:rPr lang="en-US" altLang="ru-RU" dirty="0" smtClean="0">
-                <a:solidFill>
-                  <a:schemeClr val="bg1"/>
-                </a:solidFill>
-                <a:latin typeface="Bahnschrift" panose="020B0502040204020203" pitchFamily="34" charset="0"/>
-              </a:rPr>
-              <a:t>, </a:t>
-            </a:r>
-            <a:r>
-              <a:rPr lang="en-US" altLang="en-US" dirty="0" err="1" smtClean="0">
-                <a:solidFill>
-                  <a:schemeClr val="bg1"/>
-                </a:solidFill>
-                <a:latin typeface="Bahnschrift" panose="020B0502040204020203" pitchFamily="34" charset="0"/>
-              </a:rPr>
-              <a:t>нормализованы</a:t>
-            </a:r>
-            <a:r>
-              <a:rPr lang="en-US" altLang="ru-RU" dirty="0" smtClean="0">
-                <a:solidFill>
-                  <a:schemeClr val="bg1"/>
-                </a:solidFill>
-                <a:latin typeface="Bahnschrift" panose="020B0502040204020203" pitchFamily="34" charset="0"/>
-              </a:rPr>
-              <a:t> </a:t>
-            </a:r>
-            <a:r>
-              <a:rPr lang="en-US" altLang="en-US" dirty="0" err="1" smtClean="0">
-                <a:solidFill>
-                  <a:schemeClr val="bg1"/>
-                </a:solidFill>
-                <a:latin typeface="Bahnschrift" panose="020B0502040204020203" pitchFamily="34" charset="0"/>
-              </a:rPr>
-              <a:t>форматы</a:t>
-            </a:r>
-            <a:endParaRPr lang="en-US" altLang="ru-RU" dirty="0" smtClean="0">
-              <a:solidFill>
-                <a:schemeClr val="bg1"/>
-              </a:solidFill>
-              <a:latin typeface="Bahnschrift" panose="020B0502040204020203" pitchFamily="34" charset="0"/>
-            </a:endParaRPr>
-          </a:p>
-          <a:p>
-            <a:pPr marL="257175" indent="-257175"/>
-            <a:r>
-              <a:rPr lang="en-US" altLang="en-US" b="1" dirty="0" err="1" smtClean="0">
-                <a:solidFill>
-                  <a:schemeClr val="bg1"/>
-                </a:solidFill>
-                <a:latin typeface="Bahnschrift" panose="020B0502040204020203" pitchFamily="34" charset="0"/>
-              </a:rPr>
-              <a:t>Настроена</a:t>
-            </a:r>
-            <a:r>
-              <a:rPr lang="en-US" altLang="ru-RU" b="1" dirty="0" smtClean="0">
-                <a:solidFill>
-                  <a:schemeClr val="bg1"/>
-                </a:solidFill>
-                <a:latin typeface="Bahnschrift" panose="020B0502040204020203" pitchFamily="34" charset="0"/>
-              </a:rPr>
-              <a:t> </a:t>
-            </a:r>
-            <a:r>
-              <a:rPr lang="en-US" altLang="en-US" b="1" dirty="0" err="1" smtClean="0">
-                <a:solidFill>
-                  <a:schemeClr val="bg1"/>
-                </a:solidFill>
-                <a:latin typeface="Bahnschrift" panose="020B0502040204020203" pitchFamily="34" charset="0"/>
-              </a:rPr>
-              <a:t>база</a:t>
-            </a:r>
-            <a:r>
-              <a:rPr lang="en-US" altLang="ru-RU" b="1" dirty="0" smtClean="0">
-                <a:solidFill>
-                  <a:schemeClr val="bg1"/>
-                </a:solidFill>
-                <a:latin typeface="Bahnschrift" panose="020B0502040204020203" pitchFamily="34" charset="0"/>
-              </a:rPr>
-              <a:t> </a:t>
-            </a:r>
-            <a:r>
-              <a:rPr lang="en-US" altLang="en-US" b="1" dirty="0" err="1" smtClean="0">
-                <a:solidFill>
-                  <a:schemeClr val="bg1"/>
-                </a:solidFill>
-                <a:latin typeface="Bahnschrift" panose="020B0502040204020203" pitchFamily="34" charset="0"/>
-              </a:rPr>
-              <a:t>данных</a:t>
-            </a:r>
-            <a:r>
-              <a:rPr lang="en-US" altLang="ru-RU" b="1" dirty="0" smtClean="0">
-                <a:solidFill>
-                  <a:schemeClr val="bg1"/>
-                </a:solidFill>
-                <a:latin typeface="Bahnschrift" panose="020B0502040204020203" pitchFamily="34" charset="0"/>
-              </a:rPr>
-              <a:t> SQLite </a:t>
-            </a:r>
-            <a:r>
-              <a:rPr lang="en-US" altLang="en-US" dirty="0" err="1" smtClean="0">
-                <a:solidFill>
-                  <a:schemeClr val="bg1"/>
-                </a:solidFill>
-                <a:latin typeface="Bahnschrift" panose="020B0502040204020203" pitchFamily="34" charset="0"/>
-              </a:rPr>
-              <a:t>для</a:t>
-            </a:r>
-            <a:r>
-              <a:rPr lang="en-US" altLang="ru-RU" dirty="0" smtClean="0">
-                <a:solidFill>
-                  <a:schemeClr val="bg1"/>
-                </a:solidFill>
-                <a:latin typeface="Bahnschrift" panose="020B0502040204020203" pitchFamily="34" charset="0"/>
-              </a:rPr>
-              <a:t> </a:t>
-            </a:r>
-            <a:r>
-              <a:rPr lang="en-US" altLang="en-US" dirty="0" err="1" smtClean="0">
-                <a:solidFill>
-                  <a:schemeClr val="bg1"/>
-                </a:solidFill>
-                <a:latin typeface="Bahnschrift" panose="020B0502040204020203" pitchFamily="34" charset="0"/>
-              </a:rPr>
-              <a:t>хранения</a:t>
-            </a:r>
-            <a:r>
-              <a:rPr lang="en-US" altLang="ru-RU" dirty="0" smtClean="0">
-                <a:solidFill>
-                  <a:schemeClr val="bg1"/>
-                </a:solidFill>
-                <a:latin typeface="Bahnschrift" panose="020B0502040204020203" pitchFamily="34" charset="0"/>
-              </a:rPr>
-              <a:t> </a:t>
-            </a:r>
-            <a:r>
-              <a:rPr lang="en-US" altLang="en-US" dirty="0" err="1" smtClean="0">
-                <a:solidFill>
-                  <a:schemeClr val="bg1"/>
-                </a:solidFill>
-                <a:latin typeface="Bahnschrift" panose="020B0502040204020203" pitchFamily="34" charset="0"/>
-              </a:rPr>
-              <a:t>обратной</a:t>
-            </a:r>
-            <a:r>
-              <a:rPr lang="en-US" altLang="ru-RU" dirty="0" smtClean="0">
-                <a:solidFill>
-                  <a:schemeClr val="bg1"/>
-                </a:solidFill>
-                <a:latin typeface="Bahnschrift" panose="020B0502040204020203" pitchFamily="34" charset="0"/>
-              </a:rPr>
-              <a:t> </a:t>
-            </a:r>
-            <a:r>
-              <a:rPr lang="en-US" altLang="en-US" dirty="0" err="1" smtClean="0">
-                <a:solidFill>
-                  <a:schemeClr val="bg1"/>
-                </a:solidFill>
-                <a:latin typeface="Bahnschrift" panose="020B0502040204020203" pitchFamily="34" charset="0"/>
-              </a:rPr>
-              <a:t>связи</a:t>
-            </a:r>
-            <a:r>
-              <a:rPr lang="en-US" altLang="ru-RU" dirty="0" smtClean="0">
-                <a:solidFill>
-                  <a:schemeClr val="bg1"/>
-                </a:solidFill>
-                <a:latin typeface="Bahnschrift" panose="020B0502040204020203" pitchFamily="34" charset="0"/>
-              </a:rPr>
-              <a:t> </a:t>
-            </a:r>
-            <a:r>
-              <a:rPr lang="en-US" altLang="en-US" dirty="0" err="1" smtClean="0">
-                <a:solidFill>
-                  <a:schemeClr val="bg1"/>
-                </a:solidFill>
-                <a:latin typeface="Bahnschrift" panose="020B0502040204020203" pitchFamily="34" charset="0"/>
-              </a:rPr>
-              <a:t>от</a:t>
-            </a:r>
-            <a:r>
-              <a:rPr lang="en-US" altLang="ru-RU" dirty="0" smtClean="0">
-                <a:solidFill>
-                  <a:schemeClr val="bg1"/>
-                </a:solidFill>
-                <a:latin typeface="Bahnschrift" panose="020B0502040204020203" pitchFamily="34" charset="0"/>
-              </a:rPr>
-              <a:t> </a:t>
-            </a:r>
-            <a:r>
-              <a:rPr lang="en-US" altLang="en-US" dirty="0" err="1" smtClean="0">
-                <a:solidFill>
-                  <a:schemeClr val="bg1"/>
-                </a:solidFill>
-                <a:latin typeface="Bahnschrift" panose="020B0502040204020203" pitchFamily="34" charset="0"/>
-              </a:rPr>
-              <a:t>пользователей</a:t>
-            </a:r>
-            <a:r>
-              <a:rPr lang="en-US" altLang="ru-RU" dirty="0" smtClean="0">
-                <a:solidFill>
-                  <a:schemeClr val="bg1"/>
-                </a:solidFill>
-                <a:latin typeface="Bahnschrift" panose="020B0502040204020203" pitchFamily="34" charset="0"/>
-              </a:rPr>
-              <a:t> (</a:t>
-            </a:r>
-            <a:r>
-              <a:rPr lang="en-US" altLang="en-US" dirty="0" err="1" smtClean="0">
-                <a:solidFill>
-                  <a:schemeClr val="bg1"/>
-                </a:solidFill>
-                <a:latin typeface="Bahnschrift" panose="020B0502040204020203" pitchFamily="34" charset="0"/>
-              </a:rPr>
-              <a:t>таблица</a:t>
-            </a:r>
-            <a:r>
-              <a:rPr lang="en-US" altLang="ru-RU" dirty="0" smtClean="0">
-                <a:solidFill>
-                  <a:schemeClr val="bg1"/>
-                </a:solidFill>
-                <a:latin typeface="Bahnschrift" panose="020B0502040204020203" pitchFamily="34" charset="0"/>
-              </a:rPr>
-              <a:t> feedbacks</a:t>
-            </a:r>
-            <a:r>
-              <a:rPr lang="en-US" altLang="ru-RU" dirty="0" smtClean="0">
-                <a:solidFill>
-                  <a:schemeClr val="bg1"/>
-                </a:solidFill>
-                <a:latin typeface="Bahnschrift" panose="020B0502040204020203" pitchFamily="34" charset="0"/>
-              </a:rPr>
-              <a:t>)</a:t>
-            </a:r>
-            <a:endParaRPr lang="en-US" altLang="ru-RU" dirty="0" smtClean="0">
-              <a:solidFill>
-                <a:schemeClr val="bg1"/>
-              </a:solidFill>
-              <a:latin typeface="Bahnschrift" panose="020B0502040204020203" pitchFamily="34" charset="0"/>
-            </a:endParaRPr>
-          </a:p>
-          <a:p>
-            <a:pPr marL="257175" indent="-257175"/>
-            <a:r>
-              <a:rPr lang="en-US" altLang="en-US" b="1" dirty="0" err="1" smtClean="0">
-                <a:solidFill>
-                  <a:schemeClr val="bg1"/>
-                </a:solidFill>
-                <a:latin typeface="Bahnschrift" panose="020B0502040204020203" pitchFamily="34" charset="0"/>
-              </a:rPr>
-              <a:t>Организовано</a:t>
-            </a:r>
-            <a:r>
-              <a:rPr lang="en-US" altLang="ru-RU" b="1" dirty="0" smtClean="0">
-                <a:solidFill>
-                  <a:schemeClr val="bg1"/>
-                </a:solidFill>
-                <a:latin typeface="Bahnschrift" panose="020B0502040204020203" pitchFamily="34" charset="0"/>
-              </a:rPr>
-              <a:t> </a:t>
-            </a:r>
-            <a:r>
-              <a:rPr lang="en-US" altLang="en-US" b="1" dirty="0" err="1" smtClean="0">
-                <a:solidFill>
-                  <a:schemeClr val="bg1"/>
-                </a:solidFill>
-                <a:latin typeface="Bahnschrift" panose="020B0502040204020203" pitchFamily="34" charset="0"/>
-              </a:rPr>
-              <a:t>версионирование</a:t>
-            </a:r>
-            <a:r>
-              <a:rPr lang="en-US" altLang="ru-RU" b="1" dirty="0" smtClean="0">
-                <a:solidFill>
-                  <a:schemeClr val="bg1"/>
-                </a:solidFill>
-                <a:latin typeface="Bahnschrift" panose="020B0502040204020203" pitchFamily="34" charset="0"/>
-              </a:rPr>
-              <a:t> </a:t>
-            </a:r>
-            <a:r>
-              <a:rPr lang="en-US" altLang="en-US" b="1" dirty="0" err="1" smtClean="0">
-                <a:solidFill>
-                  <a:schemeClr val="bg1"/>
-                </a:solidFill>
-                <a:latin typeface="Bahnschrift" panose="020B0502040204020203" pitchFamily="34" charset="0"/>
-              </a:rPr>
-              <a:t>датасетов</a:t>
-            </a:r>
-            <a:r>
-              <a:rPr lang="en-US" altLang="ru-RU" b="1" dirty="0" smtClean="0">
-                <a:solidFill>
-                  <a:schemeClr val="bg1"/>
-                </a:solidFill>
-                <a:latin typeface="Bahnschrift" panose="020B0502040204020203" pitchFamily="34" charset="0"/>
-              </a:rPr>
-              <a:t>:</a:t>
-            </a:r>
-            <a:r>
-              <a:rPr lang="en-US" altLang="ru-RU" dirty="0" smtClean="0">
-                <a:solidFill>
-                  <a:schemeClr val="bg1"/>
-                </a:solidFill>
-                <a:latin typeface="Bahnschrift" panose="020B0502040204020203" pitchFamily="34" charset="0"/>
-              </a:rPr>
-              <a:t> </a:t>
-            </a:r>
-            <a:r>
-              <a:rPr lang="en-US" altLang="en-US" dirty="0" err="1" smtClean="0">
-                <a:solidFill>
-                  <a:schemeClr val="bg1"/>
-                </a:solidFill>
-                <a:latin typeface="Bahnschrift" panose="020B0502040204020203" pitchFamily="34" charset="0"/>
-              </a:rPr>
-              <a:t>сохранение</a:t>
-            </a:r>
-            <a:r>
-              <a:rPr lang="en-US" altLang="ru-RU" dirty="0" smtClean="0">
-                <a:solidFill>
-                  <a:schemeClr val="bg1"/>
-                </a:solidFill>
-                <a:latin typeface="Bahnschrift" panose="020B0502040204020203" pitchFamily="34" charset="0"/>
-              </a:rPr>
-              <a:t> </a:t>
-            </a:r>
-            <a:r>
-              <a:rPr lang="en-US" altLang="en-US" dirty="0" err="1" smtClean="0">
-                <a:solidFill>
-                  <a:schemeClr val="bg1"/>
-                </a:solidFill>
-                <a:latin typeface="Bahnschrift" panose="020B0502040204020203" pitchFamily="34" charset="0"/>
-              </a:rPr>
-              <a:t>метаданных</a:t>
-            </a:r>
-            <a:r>
-              <a:rPr lang="en-US" altLang="ru-RU" dirty="0" smtClean="0">
-                <a:solidFill>
-                  <a:schemeClr val="bg1"/>
-                </a:solidFill>
-                <a:latin typeface="Bahnschrift" panose="020B0502040204020203" pitchFamily="34" charset="0"/>
-              </a:rPr>
-              <a:t> </a:t>
-            </a:r>
-            <a:r>
-              <a:rPr lang="en-US" altLang="en-US" dirty="0" smtClean="0">
-                <a:solidFill>
-                  <a:schemeClr val="bg1"/>
-                </a:solidFill>
-                <a:latin typeface="Bahnschrift" panose="020B0502040204020203" pitchFamily="34" charset="0"/>
-              </a:rPr>
-              <a:t>в</a:t>
-            </a:r>
-            <a:r>
-              <a:rPr lang="en-US" altLang="ru-RU" dirty="0" smtClean="0">
-                <a:solidFill>
-                  <a:schemeClr val="bg1"/>
-                </a:solidFill>
-                <a:latin typeface="Bahnschrift" panose="020B0502040204020203" pitchFamily="34" charset="0"/>
-              </a:rPr>
-              <a:t> JSON, </a:t>
-            </a:r>
-            <a:r>
-              <a:rPr lang="en-US" altLang="en-US" dirty="0" err="1" smtClean="0">
-                <a:solidFill>
-                  <a:schemeClr val="bg1"/>
-                </a:solidFill>
-                <a:latin typeface="Bahnschrift" panose="020B0502040204020203" pitchFamily="34" charset="0"/>
-              </a:rPr>
-              <a:t>поддержка</a:t>
-            </a:r>
-            <a:r>
-              <a:rPr lang="en-US" altLang="ru-RU" dirty="0" smtClean="0">
-                <a:solidFill>
-                  <a:schemeClr val="bg1"/>
-                </a:solidFill>
-                <a:latin typeface="Bahnschrift" panose="020B0502040204020203" pitchFamily="34" charset="0"/>
-              </a:rPr>
-              <a:t> </a:t>
-            </a:r>
-            <a:r>
-              <a:rPr lang="en-US" altLang="en-US" dirty="0" err="1" smtClean="0">
-                <a:solidFill>
-                  <a:schemeClr val="bg1"/>
-                </a:solidFill>
-                <a:latin typeface="Bahnschrift" panose="020B0502040204020203" pitchFamily="34" charset="0"/>
-              </a:rPr>
-              <a:t>актуальной</a:t>
-            </a:r>
-            <a:r>
-              <a:rPr lang="en-US" altLang="ru-RU" dirty="0" smtClean="0">
-                <a:solidFill>
-                  <a:schemeClr val="bg1"/>
-                </a:solidFill>
-                <a:latin typeface="Bahnschrift" panose="020B0502040204020203" pitchFamily="34" charset="0"/>
-              </a:rPr>
-              <a:t> </a:t>
-            </a:r>
-            <a:r>
-              <a:rPr lang="en-US" altLang="en-US" dirty="0" err="1" smtClean="0">
-                <a:solidFill>
-                  <a:schemeClr val="bg1"/>
-                </a:solidFill>
-                <a:latin typeface="Bahnschrift" panose="020B0502040204020203" pitchFamily="34" charset="0"/>
-              </a:rPr>
-              <a:t>версии</a:t>
-            </a:r>
-            <a:r>
-              <a:rPr lang="en-US" altLang="ru-RU" dirty="0" smtClean="0">
-                <a:solidFill>
-                  <a:schemeClr val="bg1"/>
-                </a:solidFill>
-                <a:latin typeface="Bahnschrift" panose="020B0502040204020203" pitchFamily="34" charset="0"/>
-              </a:rPr>
-              <a:t> </a:t>
-            </a:r>
-            <a:r>
-              <a:rPr lang="en-US" altLang="ru-RU" dirty="0" smtClean="0">
-                <a:solidFill>
-                  <a:schemeClr val="bg1"/>
-                </a:solidFill>
-                <a:latin typeface="Bahnschrift" panose="020B0502040204020203" pitchFamily="34" charset="0"/>
-              </a:rPr>
-              <a:t>url_dataset_features.csv</a:t>
-            </a:r>
-            <a:endParaRPr lang="en-US" altLang="ru-RU" dirty="0" smtClean="0">
-              <a:solidFill>
-                <a:schemeClr val="bg1"/>
-              </a:solidFill>
-              <a:latin typeface="Bahnschrift" panose="020B0502040204020203" pitchFamily="34" charset="0"/>
-            </a:endParaRPr>
+              <a:t> url_dataset_features.csv</a:t>
+            </a:r>
           </a:p>
           <a:p>
             <a:pPr marL="257175" indent="-257175"/>
@@ -21316,13 +21342,7 @@
               <a:rPr lang="ru-RU" b="1" dirty="0" smtClean="0">
                 <a:latin typeface="Bahnschrift" panose="020B0502040204020203" pitchFamily="34" charset="0"/>
               </a:rPr>
-              <a:t>Функциональные </a:t>
-            </a:r>
-            <a:r>
-              <a:rPr lang="ru-RU" b="1" dirty="0" smtClean="0">
-                <a:latin typeface="Bahnschrift" panose="020B0502040204020203" pitchFamily="34" charset="0"/>
-              </a:rPr>
-              <a:t>возможности:</a:t>
+              <a:t>Функциональные возможности:</a:t>
             </a:r>
           </a:p>
           <a:p>
@@ -21330,19 +21350,23 @@
               <a:rPr lang="ru-RU" sz="3000" dirty="0" smtClean="0">
                 <a:latin typeface="Bahnschrift" panose="020B0502040204020203" pitchFamily="34" charset="0"/>
               </a:rPr>
-              <a:t>Все </a:t>
-            </a:r>
+              <a:t>Все форматы URL</a:t>
+            </a:r>
+          </a:p>
+          <a:p>
             <a:r>
               <a:rPr lang="ru-RU" sz="3000" dirty="0" smtClean="0">
                 <a:latin typeface="Bahnschrift" panose="020B0502040204020203" pitchFamily="34" charset="0"/>
               </a:rPr>
-              <a:t>форматы </a:t>
-            </a:r>
+              <a:t>Многофакторный анализ (статистика, репутация, контент)</a:t>
+            </a:r>
+          </a:p>
+          <a:p>
             <a:r>
               <a:rPr lang="ru-RU" sz="3000" dirty="0" smtClean="0">
                 <a:latin typeface="Bahnschrift" panose="020B0502040204020203" pitchFamily="34" charset="0"/>
               </a:rPr>
-              <a:t>URL</a:t>
+              <a:t>Интеграция с базами угроз</a:t>
             </a:r>
           </a:p>
           <a:p>
@@ -21350,53 +21374,7 @@
               <a:rPr lang="ru-RU" sz="3000" dirty="0" smtClean="0">
                 <a:latin typeface="Bahnschrift" panose="020B0502040204020203" pitchFamily="34" charset="0"/>
               </a:rPr>
-              <a:t>Многофакторный </a:t>
-            </a:r>
-            <a:r>
-              <a:rPr lang="ru-RU" sz="3000" dirty="0" smtClean="0">
-                <a:latin typeface="Bahnschrift" panose="020B0502040204020203" pitchFamily="34" charset="0"/>
-              </a:rPr>
-              <a:t>анализ (статистика, репутация, </a:t>
-            </a:r>
-            <a:r>
-              <a:rPr lang="ru-RU" sz="3000" dirty="0" smtClean="0">
-                <a:latin typeface="Bahnschrift" panose="020B0502040204020203" pitchFamily="34" charset="0"/>
-              </a:rPr>
-              <a:t>контент)</a:t>
-            </a:r>
-          </a:p>
-          <a:p>
-            <a:r>
-              <a:rPr lang="ru-RU" sz="3000" dirty="0" smtClean="0">
-                <a:latin typeface="Bahnschrift" panose="020B0502040204020203" pitchFamily="34" charset="0"/>
-              </a:rPr>
-              <a:t>Интеграция </a:t>
-            </a:r>
-            <a:r>
-              <a:rPr lang="ru-RU" sz="3000" dirty="0" smtClean="0">
-                <a:latin typeface="Bahnschrift" panose="020B0502040204020203" pitchFamily="34" charset="0"/>
-              </a:rPr>
-              <a:t>с базами </a:t>
-            </a:r>
-            <a:r>
-              <a:rPr lang="ru-RU" sz="3000" dirty="0" smtClean="0">
-                <a:latin typeface="Bahnschrift" panose="020B0502040204020203" pitchFamily="34" charset="0"/>
-              </a:rPr>
-              <a:t>угроз</a:t>
-            </a:r>
-          </a:p>
-          <a:p>
-            <a:r>
-              <a:rPr lang="ru-RU" sz="3000" dirty="0" smtClean="0">
-                <a:latin typeface="Bahnschrift" panose="020B0502040204020203" pitchFamily="34" charset="0"/>
-              </a:rPr>
-              <a:t>Обратная </a:t>
-            </a:r>
-            <a:r>
-              <a:rPr lang="ru-RU" sz="3000" dirty="0" smtClean="0">
-                <a:latin typeface="Bahnschrift" panose="020B0502040204020203" pitchFamily="34" charset="0"/>
-              </a:rPr>
-              <a:t>связь для </a:t>
+              <a:t>Обратная связь для </a:t>
             </a:r>
             <a:r>
               <a:rPr lang="ru-RU" sz="3000" dirty="0" err="1" smtClean="0">
